--- a/public/videos/repositories/retro-game-map/retro-game-map-tech-preview.pptx
+++ b/public/videos/repositories/retro-game-map/retro-game-map-tech-preview.pptx
@@ -134,7 +134,7 @@
           <p:cNvPr id="2" name="タイトル 1">
             <a:extLst>
               <a:ext uri="{FF2B5EF4-FFF2-40B4-BE49-F238E27FC236}">
-                <a16:creationId xmlns:a16="http://schemas.microsoft.com/office/drawing/2014/main" id="{F08646BB-25B7-5E8C-17E1-B8238ED2A129}"/>
+                <a16:creationId xmlns:a16="http://schemas.microsoft.com/office/drawing/2014/main" id="{F9328DCE-7EF7-3C3A-9AF8-DF12CD998603}"/>
               </a:ext>
             </a:extLst>
           </p:cNvPr>
@@ -171,7 +171,7 @@
           <p:cNvPr id="3" name="字幕 2">
             <a:extLst>
               <a:ext uri="{FF2B5EF4-FFF2-40B4-BE49-F238E27FC236}">
-                <a16:creationId xmlns:a16="http://schemas.microsoft.com/office/drawing/2014/main" id="{ECFE7F1F-9957-F88A-B40A-46390EC6ACD9}"/>
+                <a16:creationId xmlns:a16="http://schemas.microsoft.com/office/drawing/2014/main" id="{DAA13B1D-38F5-9880-D293-9110D4D9C1D4}"/>
               </a:ext>
             </a:extLst>
           </p:cNvPr>
@@ -241,7 +241,7 @@
           <p:cNvPr id="4" name="日付プレースホルダー 3">
             <a:extLst>
               <a:ext uri="{FF2B5EF4-FFF2-40B4-BE49-F238E27FC236}">
-                <a16:creationId xmlns:a16="http://schemas.microsoft.com/office/drawing/2014/main" id="{11A51E51-6E68-5AA8-13F8-8ADFB72EA968}"/>
+                <a16:creationId xmlns:a16="http://schemas.microsoft.com/office/drawing/2014/main" id="{DEBDC4D4-70A2-3D77-353A-C4A2B3816D6A}"/>
               </a:ext>
             </a:extLst>
           </p:cNvPr>
@@ -257,7 +257,7 @@
           <a:bodyPr/>
           <a:lstStyle/>
           <a:p>
-            <a:fld id="{542A8A9A-6F7E-4754-85FD-790E31A06468}" type="datetimeFigureOut">
+            <a:fld id="{F80CB07D-9DBE-48DD-A163-7A257CF94C91}" type="datetimeFigureOut">
               <a:rPr kumimoji="1" lang="ja-JP" altLang="en-US" smtClean="0"/>
               <a:t>2026/7/30</a:t>
             </a:fld>
@@ -270,7 +270,7 @@
           <p:cNvPr id="5" name="フッター プレースホルダー 4">
             <a:extLst>
               <a:ext uri="{FF2B5EF4-FFF2-40B4-BE49-F238E27FC236}">
-                <a16:creationId xmlns:a16="http://schemas.microsoft.com/office/drawing/2014/main" id="{4425C99C-E62E-903F-835C-5248ACAC2607}"/>
+                <a16:creationId xmlns:a16="http://schemas.microsoft.com/office/drawing/2014/main" id="{DB1D19F1-CFD0-E2E8-0696-D759FEFB8987}"/>
               </a:ext>
             </a:extLst>
           </p:cNvPr>
@@ -295,7 +295,7 @@
           <p:cNvPr id="6" name="スライド番号プレースホルダー 5">
             <a:extLst>
               <a:ext uri="{FF2B5EF4-FFF2-40B4-BE49-F238E27FC236}">
-                <a16:creationId xmlns:a16="http://schemas.microsoft.com/office/drawing/2014/main" id="{CD514E17-9F50-C116-8731-52F586AA7882}"/>
+                <a16:creationId xmlns:a16="http://schemas.microsoft.com/office/drawing/2014/main" id="{18C10DE6-7CEF-A566-BFB1-127CD15A216B}"/>
               </a:ext>
             </a:extLst>
           </p:cNvPr>
@@ -311,7 +311,7 @@
           <a:bodyPr/>
           <a:lstStyle/>
           <a:p>
-            <a:fld id="{849FD812-8448-4EDB-9DC0-EFC5EEA55363}" type="slidenum">
+            <a:fld id="{67EFB87E-B37C-4131-96DA-F16E65A9FE32}" type="slidenum">
               <a:rPr kumimoji="1" lang="ja-JP" altLang="en-US" smtClean="0"/>
               <a:t>‹#›</a:t>
             </a:fld>
@@ -322,7 +322,7 @@
     </p:spTree>
     <p:extLst>
       <p:ext uri="{BB962C8B-B14F-4D97-AF65-F5344CB8AC3E}">
-        <p14:creationId xmlns:p14="http://schemas.microsoft.com/office/powerpoint/2010/main" val="2691834299"/>
+        <p14:creationId xmlns:p14="http://schemas.microsoft.com/office/powerpoint/2010/main" val="2709651040"/>
       </p:ext>
     </p:extLst>
   </p:cSld>
@@ -354,7 +354,7 @@
           <p:cNvPr id="2" name="タイトル 1">
             <a:extLst>
               <a:ext uri="{FF2B5EF4-FFF2-40B4-BE49-F238E27FC236}">
-                <a16:creationId xmlns:a16="http://schemas.microsoft.com/office/drawing/2014/main" id="{5C7329FC-AA01-9D43-0870-58555AAB88ED}"/>
+                <a16:creationId xmlns:a16="http://schemas.microsoft.com/office/drawing/2014/main" id="{C4AB00CC-5744-9B93-3F1C-FAD44E389143}"/>
               </a:ext>
             </a:extLst>
           </p:cNvPr>
@@ -382,7 +382,7 @@
           <p:cNvPr id="3" name="縦書きテキスト プレースホルダー 2">
             <a:extLst>
               <a:ext uri="{FF2B5EF4-FFF2-40B4-BE49-F238E27FC236}">
-                <a16:creationId xmlns:a16="http://schemas.microsoft.com/office/drawing/2014/main" id="{164E1858-88C0-4278-64AC-D51E892176AA}"/>
+                <a16:creationId xmlns:a16="http://schemas.microsoft.com/office/drawing/2014/main" id="{DC94E818-EB20-87F9-413A-2598ADC70DF4}"/>
               </a:ext>
             </a:extLst>
           </p:cNvPr>
@@ -471,7 +471,7 @@
           <p:cNvPr id="4" name="日付プレースホルダー 3">
             <a:extLst>
               <a:ext uri="{FF2B5EF4-FFF2-40B4-BE49-F238E27FC236}">
-                <a16:creationId xmlns:a16="http://schemas.microsoft.com/office/drawing/2014/main" id="{2E47F496-7A54-5A27-9BE9-291410C8AE01}"/>
+                <a16:creationId xmlns:a16="http://schemas.microsoft.com/office/drawing/2014/main" id="{4C033200-67C2-E06B-24BD-C759B284695B}"/>
               </a:ext>
             </a:extLst>
           </p:cNvPr>
@@ -487,7 +487,7 @@
           <a:bodyPr/>
           <a:lstStyle/>
           <a:p>
-            <a:fld id="{542A8A9A-6F7E-4754-85FD-790E31A06468}" type="datetimeFigureOut">
+            <a:fld id="{F80CB07D-9DBE-48DD-A163-7A257CF94C91}" type="datetimeFigureOut">
               <a:rPr kumimoji="1" lang="ja-JP" altLang="en-US" smtClean="0"/>
               <a:t>2026/7/30</a:t>
             </a:fld>
@@ -500,7 +500,7 @@
           <p:cNvPr id="5" name="フッター プレースホルダー 4">
             <a:extLst>
               <a:ext uri="{FF2B5EF4-FFF2-40B4-BE49-F238E27FC236}">
-                <a16:creationId xmlns:a16="http://schemas.microsoft.com/office/drawing/2014/main" id="{FE028E2C-E6C7-17C7-AEA0-DD7E6920644B}"/>
+                <a16:creationId xmlns:a16="http://schemas.microsoft.com/office/drawing/2014/main" id="{BE4BD4E4-8D1D-6101-A263-0E58C328E1A5}"/>
               </a:ext>
             </a:extLst>
           </p:cNvPr>
@@ -525,7 +525,7 @@
           <p:cNvPr id="6" name="スライド番号プレースホルダー 5">
             <a:extLst>
               <a:ext uri="{FF2B5EF4-FFF2-40B4-BE49-F238E27FC236}">
-                <a16:creationId xmlns:a16="http://schemas.microsoft.com/office/drawing/2014/main" id="{9B426BCD-06BE-7336-DB33-615C3FF9C83F}"/>
+                <a16:creationId xmlns:a16="http://schemas.microsoft.com/office/drawing/2014/main" id="{62D1731F-A5FB-E112-F178-B26A9C77E0A7}"/>
               </a:ext>
             </a:extLst>
           </p:cNvPr>
@@ -541,7 +541,7 @@
           <a:bodyPr/>
           <a:lstStyle/>
           <a:p>
-            <a:fld id="{849FD812-8448-4EDB-9DC0-EFC5EEA55363}" type="slidenum">
+            <a:fld id="{67EFB87E-B37C-4131-96DA-F16E65A9FE32}" type="slidenum">
               <a:rPr kumimoji="1" lang="ja-JP" altLang="en-US" smtClean="0"/>
               <a:t>‹#›</a:t>
             </a:fld>
@@ -552,7 +552,7 @@
     </p:spTree>
     <p:extLst>
       <p:ext uri="{BB962C8B-B14F-4D97-AF65-F5344CB8AC3E}">
-        <p14:creationId xmlns:p14="http://schemas.microsoft.com/office/powerpoint/2010/main" val="246502180"/>
+        <p14:creationId xmlns:p14="http://schemas.microsoft.com/office/powerpoint/2010/main" val="3257758801"/>
       </p:ext>
     </p:extLst>
   </p:cSld>
@@ -584,7 +584,7 @@
           <p:cNvPr id="2" name="縦書きタイトル 1">
             <a:extLst>
               <a:ext uri="{FF2B5EF4-FFF2-40B4-BE49-F238E27FC236}">
-                <a16:creationId xmlns:a16="http://schemas.microsoft.com/office/drawing/2014/main" id="{56321838-522C-38F9-A20B-492149D9AFF1}"/>
+                <a16:creationId xmlns:a16="http://schemas.microsoft.com/office/drawing/2014/main" id="{1F0C0520-07F0-642D-AB0F-6615F70F4BCC}"/>
               </a:ext>
             </a:extLst>
           </p:cNvPr>
@@ -617,7 +617,7 @@
           <p:cNvPr id="3" name="縦書きテキスト プレースホルダー 2">
             <a:extLst>
               <a:ext uri="{FF2B5EF4-FFF2-40B4-BE49-F238E27FC236}">
-                <a16:creationId xmlns:a16="http://schemas.microsoft.com/office/drawing/2014/main" id="{8D0C5B77-4105-4BAD-E7AC-FE905F134F93}"/>
+                <a16:creationId xmlns:a16="http://schemas.microsoft.com/office/drawing/2014/main" id="{0C461B84-27D9-72B7-58E4-F4A0E3C1853B}"/>
               </a:ext>
             </a:extLst>
           </p:cNvPr>
@@ -711,7 +711,7 @@
           <p:cNvPr id="4" name="日付プレースホルダー 3">
             <a:extLst>
               <a:ext uri="{FF2B5EF4-FFF2-40B4-BE49-F238E27FC236}">
-                <a16:creationId xmlns:a16="http://schemas.microsoft.com/office/drawing/2014/main" id="{3EC8EE25-2C6D-D928-73A6-2CCDFD48C9A6}"/>
+                <a16:creationId xmlns:a16="http://schemas.microsoft.com/office/drawing/2014/main" id="{F0909CA8-2F6E-19F9-640C-F3E3A892E4F2}"/>
               </a:ext>
             </a:extLst>
           </p:cNvPr>
@@ -727,7 +727,7 @@
           <a:bodyPr/>
           <a:lstStyle/>
           <a:p>
-            <a:fld id="{542A8A9A-6F7E-4754-85FD-790E31A06468}" type="datetimeFigureOut">
+            <a:fld id="{F80CB07D-9DBE-48DD-A163-7A257CF94C91}" type="datetimeFigureOut">
               <a:rPr kumimoji="1" lang="ja-JP" altLang="en-US" smtClean="0"/>
               <a:t>2026/7/30</a:t>
             </a:fld>
@@ -740,7 +740,7 @@
           <p:cNvPr id="5" name="フッター プレースホルダー 4">
             <a:extLst>
               <a:ext uri="{FF2B5EF4-FFF2-40B4-BE49-F238E27FC236}">
-                <a16:creationId xmlns:a16="http://schemas.microsoft.com/office/drawing/2014/main" id="{5A86312D-5832-7B3F-DF86-D453BC703B2A}"/>
+                <a16:creationId xmlns:a16="http://schemas.microsoft.com/office/drawing/2014/main" id="{060A823D-2394-D4B6-C86C-81BFAB01ED56}"/>
               </a:ext>
             </a:extLst>
           </p:cNvPr>
@@ -765,7 +765,7 @@
           <p:cNvPr id="6" name="スライド番号プレースホルダー 5">
             <a:extLst>
               <a:ext uri="{FF2B5EF4-FFF2-40B4-BE49-F238E27FC236}">
-                <a16:creationId xmlns:a16="http://schemas.microsoft.com/office/drawing/2014/main" id="{4B9E4342-8AE4-0A42-F6FA-EACA121F4633}"/>
+                <a16:creationId xmlns:a16="http://schemas.microsoft.com/office/drawing/2014/main" id="{E34FA14C-0BE5-3129-B0F6-C5E25A083151}"/>
               </a:ext>
             </a:extLst>
           </p:cNvPr>
@@ -781,7 +781,7 @@
           <a:bodyPr/>
           <a:lstStyle/>
           <a:p>
-            <a:fld id="{849FD812-8448-4EDB-9DC0-EFC5EEA55363}" type="slidenum">
+            <a:fld id="{67EFB87E-B37C-4131-96DA-F16E65A9FE32}" type="slidenum">
               <a:rPr kumimoji="1" lang="ja-JP" altLang="en-US" smtClean="0"/>
               <a:t>‹#›</a:t>
             </a:fld>
@@ -792,7 +792,7 @@
     </p:spTree>
     <p:extLst>
       <p:ext uri="{BB962C8B-B14F-4D97-AF65-F5344CB8AC3E}">
-        <p14:creationId xmlns:p14="http://schemas.microsoft.com/office/powerpoint/2010/main" val="669000692"/>
+        <p14:creationId xmlns:p14="http://schemas.microsoft.com/office/powerpoint/2010/main" val="2468015557"/>
       </p:ext>
     </p:extLst>
   </p:cSld>
@@ -824,7 +824,7 @@
           <p:cNvPr id="2" name="タイトル 1">
             <a:extLst>
               <a:ext uri="{FF2B5EF4-FFF2-40B4-BE49-F238E27FC236}">
-                <a16:creationId xmlns:a16="http://schemas.microsoft.com/office/drawing/2014/main" id="{21900A8B-2999-119D-43D8-9CDC50148D02}"/>
+                <a16:creationId xmlns:a16="http://schemas.microsoft.com/office/drawing/2014/main" id="{5EE70F4F-E020-18AF-D4B6-84A13CC138FF}"/>
               </a:ext>
             </a:extLst>
           </p:cNvPr>
@@ -852,7 +852,7 @@
           <p:cNvPr id="3" name="コンテンツ プレースホルダー 2">
             <a:extLst>
               <a:ext uri="{FF2B5EF4-FFF2-40B4-BE49-F238E27FC236}">
-                <a16:creationId xmlns:a16="http://schemas.microsoft.com/office/drawing/2014/main" id="{BE17D26D-68A9-DDD5-63D2-B673A08B4FA2}"/>
+                <a16:creationId xmlns:a16="http://schemas.microsoft.com/office/drawing/2014/main" id="{B064B208-07D6-7964-47C0-DD25B82A98E9}"/>
               </a:ext>
             </a:extLst>
           </p:cNvPr>
@@ -941,7 +941,7 @@
           <p:cNvPr id="4" name="日付プレースホルダー 3">
             <a:extLst>
               <a:ext uri="{FF2B5EF4-FFF2-40B4-BE49-F238E27FC236}">
-                <a16:creationId xmlns:a16="http://schemas.microsoft.com/office/drawing/2014/main" id="{2644EF9E-F7A3-16D2-EF8D-7AF3CDFFDE9D}"/>
+                <a16:creationId xmlns:a16="http://schemas.microsoft.com/office/drawing/2014/main" id="{0EA70A1E-7DBB-36FE-A844-000201D27236}"/>
               </a:ext>
             </a:extLst>
           </p:cNvPr>
@@ -957,7 +957,7 @@
           <a:bodyPr/>
           <a:lstStyle/>
           <a:p>
-            <a:fld id="{542A8A9A-6F7E-4754-85FD-790E31A06468}" type="datetimeFigureOut">
+            <a:fld id="{F80CB07D-9DBE-48DD-A163-7A257CF94C91}" type="datetimeFigureOut">
               <a:rPr kumimoji="1" lang="ja-JP" altLang="en-US" smtClean="0"/>
               <a:t>2026/7/30</a:t>
             </a:fld>
@@ -970,7 +970,7 @@
           <p:cNvPr id="5" name="フッター プレースホルダー 4">
             <a:extLst>
               <a:ext uri="{FF2B5EF4-FFF2-40B4-BE49-F238E27FC236}">
-                <a16:creationId xmlns:a16="http://schemas.microsoft.com/office/drawing/2014/main" id="{99F93FF9-2058-4E2F-6EE0-079C1A2D0835}"/>
+                <a16:creationId xmlns:a16="http://schemas.microsoft.com/office/drawing/2014/main" id="{FE762E1F-E181-85E5-B358-12EA85114C51}"/>
               </a:ext>
             </a:extLst>
           </p:cNvPr>
@@ -995,7 +995,7 @@
           <p:cNvPr id="6" name="スライド番号プレースホルダー 5">
             <a:extLst>
               <a:ext uri="{FF2B5EF4-FFF2-40B4-BE49-F238E27FC236}">
-                <a16:creationId xmlns:a16="http://schemas.microsoft.com/office/drawing/2014/main" id="{5D17E3B8-A7D5-66D8-CF84-19D1F38E61BE}"/>
+                <a16:creationId xmlns:a16="http://schemas.microsoft.com/office/drawing/2014/main" id="{626857DB-98C7-23B8-3489-4520B5B7D2D0}"/>
               </a:ext>
             </a:extLst>
           </p:cNvPr>
@@ -1011,7 +1011,7 @@
           <a:bodyPr/>
           <a:lstStyle/>
           <a:p>
-            <a:fld id="{849FD812-8448-4EDB-9DC0-EFC5EEA55363}" type="slidenum">
+            <a:fld id="{67EFB87E-B37C-4131-96DA-F16E65A9FE32}" type="slidenum">
               <a:rPr kumimoji="1" lang="ja-JP" altLang="en-US" smtClean="0"/>
               <a:t>‹#›</a:t>
             </a:fld>
@@ -1022,7 +1022,7 @@
     </p:spTree>
     <p:extLst>
       <p:ext uri="{BB962C8B-B14F-4D97-AF65-F5344CB8AC3E}">
-        <p14:creationId xmlns:p14="http://schemas.microsoft.com/office/powerpoint/2010/main" val="399793231"/>
+        <p14:creationId xmlns:p14="http://schemas.microsoft.com/office/powerpoint/2010/main" val="1180754321"/>
       </p:ext>
     </p:extLst>
   </p:cSld>
@@ -1054,7 +1054,7 @@
           <p:cNvPr id="2" name="タイトル 1">
             <a:extLst>
               <a:ext uri="{FF2B5EF4-FFF2-40B4-BE49-F238E27FC236}">
-                <a16:creationId xmlns:a16="http://schemas.microsoft.com/office/drawing/2014/main" id="{F0350CF3-DB67-5CF2-49FD-44EB1386B65B}"/>
+                <a16:creationId xmlns:a16="http://schemas.microsoft.com/office/drawing/2014/main" id="{A4942235-FC10-C1AC-CECA-7F81A5F8A21F}"/>
               </a:ext>
             </a:extLst>
           </p:cNvPr>
@@ -1091,7 +1091,7 @@
           <p:cNvPr id="3" name="テキスト プレースホルダー 2">
             <a:extLst>
               <a:ext uri="{FF2B5EF4-FFF2-40B4-BE49-F238E27FC236}">
-                <a16:creationId xmlns:a16="http://schemas.microsoft.com/office/drawing/2014/main" id="{5C93584F-4402-C441-9AD9-A1AEED643EB3}"/>
+                <a16:creationId xmlns:a16="http://schemas.microsoft.com/office/drawing/2014/main" id="{CA668B7A-0489-0738-5B3F-2FB603317E1C}"/>
               </a:ext>
             </a:extLst>
           </p:cNvPr>
@@ -1216,7 +1216,7 @@
           <p:cNvPr id="4" name="日付プレースホルダー 3">
             <a:extLst>
               <a:ext uri="{FF2B5EF4-FFF2-40B4-BE49-F238E27FC236}">
-                <a16:creationId xmlns:a16="http://schemas.microsoft.com/office/drawing/2014/main" id="{B1B45950-1757-4816-7618-F3B5073A0D3A}"/>
+                <a16:creationId xmlns:a16="http://schemas.microsoft.com/office/drawing/2014/main" id="{D9F00F79-D80E-C62A-95EC-227E60DE9AD1}"/>
               </a:ext>
             </a:extLst>
           </p:cNvPr>
@@ -1232,7 +1232,7 @@
           <a:bodyPr/>
           <a:lstStyle/>
           <a:p>
-            <a:fld id="{542A8A9A-6F7E-4754-85FD-790E31A06468}" type="datetimeFigureOut">
+            <a:fld id="{F80CB07D-9DBE-48DD-A163-7A257CF94C91}" type="datetimeFigureOut">
               <a:rPr kumimoji="1" lang="ja-JP" altLang="en-US" smtClean="0"/>
               <a:t>2026/7/30</a:t>
             </a:fld>
@@ -1245,7 +1245,7 @@
           <p:cNvPr id="5" name="フッター プレースホルダー 4">
             <a:extLst>
               <a:ext uri="{FF2B5EF4-FFF2-40B4-BE49-F238E27FC236}">
-                <a16:creationId xmlns:a16="http://schemas.microsoft.com/office/drawing/2014/main" id="{97C4401E-D818-027A-D1BC-3DD696BD87D7}"/>
+                <a16:creationId xmlns:a16="http://schemas.microsoft.com/office/drawing/2014/main" id="{48C219D5-3A8F-CABB-E55F-C2C29811F0FA}"/>
               </a:ext>
             </a:extLst>
           </p:cNvPr>
@@ -1270,7 +1270,7 @@
           <p:cNvPr id="6" name="スライド番号プレースホルダー 5">
             <a:extLst>
               <a:ext uri="{FF2B5EF4-FFF2-40B4-BE49-F238E27FC236}">
-                <a16:creationId xmlns:a16="http://schemas.microsoft.com/office/drawing/2014/main" id="{CC92E4CD-B757-353F-FDE4-AADE498F60D2}"/>
+                <a16:creationId xmlns:a16="http://schemas.microsoft.com/office/drawing/2014/main" id="{B953486F-96AB-422C-5E78-4B565C55AE8E}"/>
               </a:ext>
             </a:extLst>
           </p:cNvPr>
@@ -1286,7 +1286,7 @@
           <a:bodyPr/>
           <a:lstStyle/>
           <a:p>
-            <a:fld id="{849FD812-8448-4EDB-9DC0-EFC5EEA55363}" type="slidenum">
+            <a:fld id="{67EFB87E-B37C-4131-96DA-F16E65A9FE32}" type="slidenum">
               <a:rPr kumimoji="1" lang="ja-JP" altLang="en-US" smtClean="0"/>
               <a:t>‹#›</a:t>
             </a:fld>
@@ -1297,7 +1297,7 @@
     </p:spTree>
     <p:extLst>
       <p:ext uri="{BB962C8B-B14F-4D97-AF65-F5344CB8AC3E}">
-        <p14:creationId xmlns:p14="http://schemas.microsoft.com/office/powerpoint/2010/main" val="3161441000"/>
+        <p14:creationId xmlns:p14="http://schemas.microsoft.com/office/powerpoint/2010/main" val="1606092826"/>
       </p:ext>
     </p:extLst>
   </p:cSld>
@@ -1329,7 +1329,7 @@
           <p:cNvPr id="2" name="タイトル 1">
             <a:extLst>
               <a:ext uri="{FF2B5EF4-FFF2-40B4-BE49-F238E27FC236}">
-                <a16:creationId xmlns:a16="http://schemas.microsoft.com/office/drawing/2014/main" id="{19B09635-56AC-B2D7-849A-E9F0A258BFC3}"/>
+                <a16:creationId xmlns:a16="http://schemas.microsoft.com/office/drawing/2014/main" id="{D2FD2D89-FF4F-BB8B-9078-EBB33C9B6CBB}"/>
               </a:ext>
             </a:extLst>
           </p:cNvPr>
@@ -1357,7 +1357,7 @@
           <p:cNvPr id="3" name="コンテンツ プレースホルダー 2">
             <a:extLst>
               <a:ext uri="{FF2B5EF4-FFF2-40B4-BE49-F238E27FC236}">
-                <a16:creationId xmlns:a16="http://schemas.microsoft.com/office/drawing/2014/main" id="{FE228E6C-4D0E-4F6C-80E1-2535583EB1C7}"/>
+                <a16:creationId xmlns:a16="http://schemas.microsoft.com/office/drawing/2014/main" id="{BFEE100F-F8BE-4661-B235-5D20C4CA1DED}"/>
               </a:ext>
             </a:extLst>
           </p:cNvPr>
@@ -1451,7 +1451,7 @@
           <p:cNvPr id="4" name="コンテンツ プレースホルダー 3">
             <a:extLst>
               <a:ext uri="{FF2B5EF4-FFF2-40B4-BE49-F238E27FC236}">
-                <a16:creationId xmlns:a16="http://schemas.microsoft.com/office/drawing/2014/main" id="{4EC4CF70-4DB3-47AC-E829-6B0356E8D721}"/>
+                <a16:creationId xmlns:a16="http://schemas.microsoft.com/office/drawing/2014/main" id="{45943215-2CC5-9B18-5BDC-FE9406F04C87}"/>
               </a:ext>
             </a:extLst>
           </p:cNvPr>
@@ -1545,7 +1545,7 @@
           <p:cNvPr id="5" name="日付プレースホルダー 4">
             <a:extLst>
               <a:ext uri="{FF2B5EF4-FFF2-40B4-BE49-F238E27FC236}">
-                <a16:creationId xmlns:a16="http://schemas.microsoft.com/office/drawing/2014/main" id="{22527DD2-934A-286D-CB6A-41E6A698506F}"/>
+                <a16:creationId xmlns:a16="http://schemas.microsoft.com/office/drawing/2014/main" id="{3BC263BF-42B2-172A-94C5-96973FD43298}"/>
               </a:ext>
             </a:extLst>
           </p:cNvPr>
@@ -1561,7 +1561,7 @@
           <a:bodyPr/>
           <a:lstStyle/>
           <a:p>
-            <a:fld id="{542A8A9A-6F7E-4754-85FD-790E31A06468}" type="datetimeFigureOut">
+            <a:fld id="{F80CB07D-9DBE-48DD-A163-7A257CF94C91}" type="datetimeFigureOut">
               <a:rPr kumimoji="1" lang="ja-JP" altLang="en-US" smtClean="0"/>
               <a:t>2026/7/30</a:t>
             </a:fld>
@@ -1574,7 +1574,7 @@
           <p:cNvPr id="6" name="フッター プレースホルダー 5">
             <a:extLst>
               <a:ext uri="{FF2B5EF4-FFF2-40B4-BE49-F238E27FC236}">
-                <a16:creationId xmlns:a16="http://schemas.microsoft.com/office/drawing/2014/main" id="{FA253BC1-8A64-C820-C525-B42517997ACF}"/>
+                <a16:creationId xmlns:a16="http://schemas.microsoft.com/office/drawing/2014/main" id="{988EA701-81B7-551F-3DD1-E49F2380C527}"/>
               </a:ext>
             </a:extLst>
           </p:cNvPr>
@@ -1599,7 +1599,7 @@
           <p:cNvPr id="7" name="スライド番号プレースホルダー 6">
             <a:extLst>
               <a:ext uri="{FF2B5EF4-FFF2-40B4-BE49-F238E27FC236}">
-                <a16:creationId xmlns:a16="http://schemas.microsoft.com/office/drawing/2014/main" id="{00433129-9825-054F-CA22-0D46AE565411}"/>
+                <a16:creationId xmlns:a16="http://schemas.microsoft.com/office/drawing/2014/main" id="{E1E767FD-B7A1-F402-3ECC-575EB0019566}"/>
               </a:ext>
             </a:extLst>
           </p:cNvPr>
@@ -1615,7 +1615,7 @@
           <a:bodyPr/>
           <a:lstStyle/>
           <a:p>
-            <a:fld id="{849FD812-8448-4EDB-9DC0-EFC5EEA55363}" type="slidenum">
+            <a:fld id="{67EFB87E-B37C-4131-96DA-F16E65A9FE32}" type="slidenum">
               <a:rPr kumimoji="1" lang="ja-JP" altLang="en-US" smtClean="0"/>
               <a:t>‹#›</a:t>
             </a:fld>
@@ -1626,7 +1626,7 @@
     </p:spTree>
     <p:extLst>
       <p:ext uri="{BB962C8B-B14F-4D97-AF65-F5344CB8AC3E}">
-        <p14:creationId xmlns:p14="http://schemas.microsoft.com/office/powerpoint/2010/main" val="3492783765"/>
+        <p14:creationId xmlns:p14="http://schemas.microsoft.com/office/powerpoint/2010/main" val="2090935751"/>
       </p:ext>
     </p:extLst>
   </p:cSld>
@@ -1658,7 +1658,7 @@
           <p:cNvPr id="2" name="タイトル 1">
             <a:extLst>
               <a:ext uri="{FF2B5EF4-FFF2-40B4-BE49-F238E27FC236}">
-                <a16:creationId xmlns:a16="http://schemas.microsoft.com/office/drawing/2014/main" id="{A14957B3-3939-31B7-6E32-688F17CFBCE2}"/>
+                <a16:creationId xmlns:a16="http://schemas.microsoft.com/office/drawing/2014/main" id="{5D8784AC-5DC7-FFEB-9206-3AB1D6BA3331}"/>
               </a:ext>
             </a:extLst>
           </p:cNvPr>
@@ -1691,7 +1691,7 @@
           <p:cNvPr id="3" name="テキスト プレースホルダー 2">
             <a:extLst>
               <a:ext uri="{FF2B5EF4-FFF2-40B4-BE49-F238E27FC236}">
-                <a16:creationId xmlns:a16="http://schemas.microsoft.com/office/drawing/2014/main" id="{2E4D1D6A-DBAC-C338-0D41-4A86D0E4E053}"/>
+                <a16:creationId xmlns:a16="http://schemas.microsoft.com/office/drawing/2014/main" id="{C0EB655D-2520-5890-E965-99AE09A5DAC5}"/>
               </a:ext>
             </a:extLst>
           </p:cNvPr>
@@ -1762,7 +1762,7 @@
           <p:cNvPr id="4" name="コンテンツ プレースホルダー 3">
             <a:extLst>
               <a:ext uri="{FF2B5EF4-FFF2-40B4-BE49-F238E27FC236}">
-                <a16:creationId xmlns:a16="http://schemas.microsoft.com/office/drawing/2014/main" id="{AFDB4AD2-8CFB-472E-70DB-E4419EC09EA6}"/>
+                <a16:creationId xmlns:a16="http://schemas.microsoft.com/office/drawing/2014/main" id="{DAF49E0F-AF59-CB16-E2FC-5AB7E27EA49D}"/>
               </a:ext>
             </a:extLst>
           </p:cNvPr>
@@ -1856,7 +1856,7 @@
           <p:cNvPr id="5" name="テキスト プレースホルダー 4">
             <a:extLst>
               <a:ext uri="{FF2B5EF4-FFF2-40B4-BE49-F238E27FC236}">
-                <a16:creationId xmlns:a16="http://schemas.microsoft.com/office/drawing/2014/main" id="{44445FD2-4AFA-E7EE-8109-D2F02D5D77C3}"/>
+                <a16:creationId xmlns:a16="http://schemas.microsoft.com/office/drawing/2014/main" id="{68B4865B-A36B-6700-E510-B381C7996A3F}"/>
               </a:ext>
             </a:extLst>
           </p:cNvPr>
@@ -1927,7 +1927,7 @@
           <p:cNvPr id="6" name="コンテンツ プレースホルダー 5">
             <a:extLst>
               <a:ext uri="{FF2B5EF4-FFF2-40B4-BE49-F238E27FC236}">
-                <a16:creationId xmlns:a16="http://schemas.microsoft.com/office/drawing/2014/main" id="{A312CDCC-2956-CAAD-8119-2D4455A987BC}"/>
+                <a16:creationId xmlns:a16="http://schemas.microsoft.com/office/drawing/2014/main" id="{B15640AE-FC1D-FC6E-76A7-DAA43DCF24F0}"/>
               </a:ext>
             </a:extLst>
           </p:cNvPr>
@@ -2021,7 +2021,7 @@
           <p:cNvPr id="7" name="日付プレースホルダー 6">
             <a:extLst>
               <a:ext uri="{FF2B5EF4-FFF2-40B4-BE49-F238E27FC236}">
-                <a16:creationId xmlns:a16="http://schemas.microsoft.com/office/drawing/2014/main" id="{33ECCE18-4EF4-1066-6600-55D5B089D929}"/>
+                <a16:creationId xmlns:a16="http://schemas.microsoft.com/office/drawing/2014/main" id="{9C11350E-A083-B7B8-914F-EE9136AF7837}"/>
               </a:ext>
             </a:extLst>
           </p:cNvPr>
@@ -2037,7 +2037,7 @@
           <a:bodyPr/>
           <a:lstStyle/>
           <a:p>
-            <a:fld id="{542A8A9A-6F7E-4754-85FD-790E31A06468}" type="datetimeFigureOut">
+            <a:fld id="{F80CB07D-9DBE-48DD-A163-7A257CF94C91}" type="datetimeFigureOut">
               <a:rPr kumimoji="1" lang="ja-JP" altLang="en-US" smtClean="0"/>
               <a:t>2026/7/30</a:t>
             </a:fld>
@@ -2050,7 +2050,7 @@
           <p:cNvPr id="8" name="フッター プレースホルダー 7">
             <a:extLst>
               <a:ext uri="{FF2B5EF4-FFF2-40B4-BE49-F238E27FC236}">
-                <a16:creationId xmlns:a16="http://schemas.microsoft.com/office/drawing/2014/main" id="{E579C96D-662F-AB1B-CFFB-ABD715AB67C4}"/>
+                <a16:creationId xmlns:a16="http://schemas.microsoft.com/office/drawing/2014/main" id="{6FF7EEEC-AB30-0800-6743-0D509AB69ACD}"/>
               </a:ext>
             </a:extLst>
           </p:cNvPr>
@@ -2075,7 +2075,7 @@
           <p:cNvPr id="9" name="スライド番号プレースホルダー 8">
             <a:extLst>
               <a:ext uri="{FF2B5EF4-FFF2-40B4-BE49-F238E27FC236}">
-                <a16:creationId xmlns:a16="http://schemas.microsoft.com/office/drawing/2014/main" id="{B38C597C-45CC-1EBF-D02B-824E60D2D95E}"/>
+                <a16:creationId xmlns:a16="http://schemas.microsoft.com/office/drawing/2014/main" id="{ADADD823-72E9-DC2A-9031-D02D91A0A6EC}"/>
               </a:ext>
             </a:extLst>
           </p:cNvPr>
@@ -2091,7 +2091,7 @@
           <a:bodyPr/>
           <a:lstStyle/>
           <a:p>
-            <a:fld id="{849FD812-8448-4EDB-9DC0-EFC5EEA55363}" type="slidenum">
+            <a:fld id="{67EFB87E-B37C-4131-96DA-F16E65A9FE32}" type="slidenum">
               <a:rPr kumimoji="1" lang="ja-JP" altLang="en-US" smtClean="0"/>
               <a:t>‹#›</a:t>
             </a:fld>
@@ -2102,7 +2102,7 @@
     </p:spTree>
     <p:extLst>
       <p:ext uri="{BB962C8B-B14F-4D97-AF65-F5344CB8AC3E}">
-        <p14:creationId xmlns:p14="http://schemas.microsoft.com/office/powerpoint/2010/main" val="840641087"/>
+        <p14:creationId xmlns:p14="http://schemas.microsoft.com/office/powerpoint/2010/main" val="162410092"/>
       </p:ext>
     </p:extLst>
   </p:cSld>
@@ -2134,7 +2134,7 @@
           <p:cNvPr id="2" name="タイトル 1">
             <a:extLst>
               <a:ext uri="{FF2B5EF4-FFF2-40B4-BE49-F238E27FC236}">
-                <a16:creationId xmlns:a16="http://schemas.microsoft.com/office/drawing/2014/main" id="{3AFC3015-C3D5-B262-82C5-C7067F94A090}"/>
+                <a16:creationId xmlns:a16="http://schemas.microsoft.com/office/drawing/2014/main" id="{9697EFDE-63A4-DD6F-31A8-0E62EAB9EF66}"/>
               </a:ext>
             </a:extLst>
           </p:cNvPr>
@@ -2162,7 +2162,7 @@
           <p:cNvPr id="3" name="日付プレースホルダー 2">
             <a:extLst>
               <a:ext uri="{FF2B5EF4-FFF2-40B4-BE49-F238E27FC236}">
-                <a16:creationId xmlns:a16="http://schemas.microsoft.com/office/drawing/2014/main" id="{AF3EB927-B670-9F79-A6A8-12000E08C098}"/>
+                <a16:creationId xmlns:a16="http://schemas.microsoft.com/office/drawing/2014/main" id="{00A4FEC2-F64D-7BA0-A519-1D8EB1B01FDC}"/>
               </a:ext>
             </a:extLst>
           </p:cNvPr>
@@ -2178,7 +2178,7 @@
           <a:bodyPr/>
           <a:lstStyle/>
           <a:p>
-            <a:fld id="{542A8A9A-6F7E-4754-85FD-790E31A06468}" type="datetimeFigureOut">
+            <a:fld id="{F80CB07D-9DBE-48DD-A163-7A257CF94C91}" type="datetimeFigureOut">
               <a:rPr kumimoji="1" lang="ja-JP" altLang="en-US" smtClean="0"/>
               <a:t>2026/7/30</a:t>
             </a:fld>
@@ -2191,7 +2191,7 @@
           <p:cNvPr id="4" name="フッター プレースホルダー 3">
             <a:extLst>
               <a:ext uri="{FF2B5EF4-FFF2-40B4-BE49-F238E27FC236}">
-                <a16:creationId xmlns:a16="http://schemas.microsoft.com/office/drawing/2014/main" id="{0A66E3D6-FB06-363B-0F22-92BA9AF07936}"/>
+                <a16:creationId xmlns:a16="http://schemas.microsoft.com/office/drawing/2014/main" id="{6013DCCC-4FA7-8DCF-3B0B-64F26C6E5E6F}"/>
               </a:ext>
             </a:extLst>
           </p:cNvPr>
@@ -2216,7 +2216,7 @@
           <p:cNvPr id="5" name="スライド番号プレースホルダー 4">
             <a:extLst>
               <a:ext uri="{FF2B5EF4-FFF2-40B4-BE49-F238E27FC236}">
-                <a16:creationId xmlns:a16="http://schemas.microsoft.com/office/drawing/2014/main" id="{B821577F-051F-044E-CEDE-8C7960A4F2CB}"/>
+                <a16:creationId xmlns:a16="http://schemas.microsoft.com/office/drawing/2014/main" id="{0C5E85AF-8717-51A1-A0F4-8B9111B65C3E}"/>
               </a:ext>
             </a:extLst>
           </p:cNvPr>
@@ -2232,7 +2232,7 @@
           <a:bodyPr/>
           <a:lstStyle/>
           <a:p>
-            <a:fld id="{849FD812-8448-4EDB-9DC0-EFC5EEA55363}" type="slidenum">
+            <a:fld id="{67EFB87E-B37C-4131-96DA-F16E65A9FE32}" type="slidenum">
               <a:rPr kumimoji="1" lang="ja-JP" altLang="en-US" smtClean="0"/>
               <a:t>‹#›</a:t>
             </a:fld>
@@ -2243,7 +2243,7 @@
     </p:spTree>
     <p:extLst>
       <p:ext uri="{BB962C8B-B14F-4D97-AF65-F5344CB8AC3E}">
-        <p14:creationId xmlns:p14="http://schemas.microsoft.com/office/powerpoint/2010/main" val="2757348229"/>
+        <p14:creationId xmlns:p14="http://schemas.microsoft.com/office/powerpoint/2010/main" val="3719116760"/>
       </p:ext>
     </p:extLst>
   </p:cSld>
@@ -2275,7 +2275,7 @@
           <p:cNvPr id="2" name="日付プレースホルダー 1">
             <a:extLst>
               <a:ext uri="{FF2B5EF4-FFF2-40B4-BE49-F238E27FC236}">
-                <a16:creationId xmlns:a16="http://schemas.microsoft.com/office/drawing/2014/main" id="{AA05DB68-3B54-3E9D-AEF2-E3CDE5F9BB35}"/>
+                <a16:creationId xmlns:a16="http://schemas.microsoft.com/office/drawing/2014/main" id="{CD21568A-E54E-6851-236B-0B57EF684912}"/>
               </a:ext>
             </a:extLst>
           </p:cNvPr>
@@ -2291,7 +2291,7 @@
           <a:bodyPr/>
           <a:lstStyle/>
           <a:p>
-            <a:fld id="{542A8A9A-6F7E-4754-85FD-790E31A06468}" type="datetimeFigureOut">
+            <a:fld id="{F80CB07D-9DBE-48DD-A163-7A257CF94C91}" type="datetimeFigureOut">
               <a:rPr kumimoji="1" lang="ja-JP" altLang="en-US" smtClean="0"/>
               <a:t>2026/7/30</a:t>
             </a:fld>
@@ -2304,7 +2304,7 @@
           <p:cNvPr id="3" name="フッター プレースホルダー 2">
             <a:extLst>
               <a:ext uri="{FF2B5EF4-FFF2-40B4-BE49-F238E27FC236}">
-                <a16:creationId xmlns:a16="http://schemas.microsoft.com/office/drawing/2014/main" id="{8C369440-E0CD-4784-E1C5-20FFF9FD0F4B}"/>
+                <a16:creationId xmlns:a16="http://schemas.microsoft.com/office/drawing/2014/main" id="{D5512DDA-7749-24FD-015C-698A05886F4C}"/>
               </a:ext>
             </a:extLst>
           </p:cNvPr>
@@ -2329,7 +2329,7 @@
           <p:cNvPr id="4" name="スライド番号プレースホルダー 3">
             <a:extLst>
               <a:ext uri="{FF2B5EF4-FFF2-40B4-BE49-F238E27FC236}">
-                <a16:creationId xmlns:a16="http://schemas.microsoft.com/office/drawing/2014/main" id="{E7E4A6D2-ECC7-F61D-7F2B-A5427BCAB1E8}"/>
+                <a16:creationId xmlns:a16="http://schemas.microsoft.com/office/drawing/2014/main" id="{28086114-1DAC-F1B1-129F-8942742982E1}"/>
               </a:ext>
             </a:extLst>
           </p:cNvPr>
@@ -2345,7 +2345,7 @@
           <a:bodyPr/>
           <a:lstStyle/>
           <a:p>
-            <a:fld id="{849FD812-8448-4EDB-9DC0-EFC5EEA55363}" type="slidenum">
+            <a:fld id="{67EFB87E-B37C-4131-96DA-F16E65A9FE32}" type="slidenum">
               <a:rPr kumimoji="1" lang="ja-JP" altLang="en-US" smtClean="0"/>
               <a:t>‹#›</a:t>
             </a:fld>
@@ -2356,7 +2356,7 @@
     </p:spTree>
     <p:extLst>
       <p:ext uri="{BB962C8B-B14F-4D97-AF65-F5344CB8AC3E}">
-        <p14:creationId xmlns:p14="http://schemas.microsoft.com/office/powerpoint/2010/main" val="428715195"/>
+        <p14:creationId xmlns:p14="http://schemas.microsoft.com/office/powerpoint/2010/main" val="1319749109"/>
       </p:ext>
     </p:extLst>
   </p:cSld>
@@ -2388,7 +2388,7 @@
           <p:cNvPr id="2" name="タイトル 1">
             <a:extLst>
               <a:ext uri="{FF2B5EF4-FFF2-40B4-BE49-F238E27FC236}">
-                <a16:creationId xmlns:a16="http://schemas.microsoft.com/office/drawing/2014/main" id="{F0974B93-2748-C3B2-CAF1-436093725933}"/>
+                <a16:creationId xmlns:a16="http://schemas.microsoft.com/office/drawing/2014/main" id="{41932CD6-E388-D768-129E-E2FEB7F65657}"/>
               </a:ext>
             </a:extLst>
           </p:cNvPr>
@@ -2425,7 +2425,7 @@
           <p:cNvPr id="3" name="コンテンツ プレースホルダー 2">
             <a:extLst>
               <a:ext uri="{FF2B5EF4-FFF2-40B4-BE49-F238E27FC236}">
-                <a16:creationId xmlns:a16="http://schemas.microsoft.com/office/drawing/2014/main" id="{A84E065C-2C07-A370-C3EB-8D27BEE3E9A7}"/>
+                <a16:creationId xmlns:a16="http://schemas.microsoft.com/office/drawing/2014/main" id="{6E042120-349B-A24F-851D-4C5E2AB2BBE5}"/>
               </a:ext>
             </a:extLst>
           </p:cNvPr>
@@ -2547,7 +2547,7 @@
           <p:cNvPr id="4" name="テキスト プレースホルダー 3">
             <a:extLst>
               <a:ext uri="{FF2B5EF4-FFF2-40B4-BE49-F238E27FC236}">
-                <a16:creationId xmlns:a16="http://schemas.microsoft.com/office/drawing/2014/main" id="{A5BD800A-90A6-B91C-7972-ED8871EC2B89}"/>
+                <a16:creationId xmlns:a16="http://schemas.microsoft.com/office/drawing/2014/main" id="{2DC51E16-37BA-3C1A-921A-AD194A758721}"/>
               </a:ext>
             </a:extLst>
           </p:cNvPr>
@@ -2618,7 +2618,7 @@
           <p:cNvPr id="5" name="日付プレースホルダー 4">
             <a:extLst>
               <a:ext uri="{FF2B5EF4-FFF2-40B4-BE49-F238E27FC236}">
-                <a16:creationId xmlns:a16="http://schemas.microsoft.com/office/drawing/2014/main" id="{8B6FAE0C-ECAA-B5C7-0756-72F4273A084E}"/>
+                <a16:creationId xmlns:a16="http://schemas.microsoft.com/office/drawing/2014/main" id="{12CC71CB-76A7-1399-84A0-ADC2F0D048FC}"/>
               </a:ext>
             </a:extLst>
           </p:cNvPr>
@@ -2634,7 +2634,7 @@
           <a:bodyPr/>
           <a:lstStyle/>
           <a:p>
-            <a:fld id="{542A8A9A-6F7E-4754-85FD-790E31A06468}" type="datetimeFigureOut">
+            <a:fld id="{F80CB07D-9DBE-48DD-A163-7A257CF94C91}" type="datetimeFigureOut">
               <a:rPr kumimoji="1" lang="ja-JP" altLang="en-US" smtClean="0"/>
               <a:t>2026/7/30</a:t>
             </a:fld>
@@ -2647,7 +2647,7 @@
           <p:cNvPr id="6" name="フッター プレースホルダー 5">
             <a:extLst>
               <a:ext uri="{FF2B5EF4-FFF2-40B4-BE49-F238E27FC236}">
-                <a16:creationId xmlns:a16="http://schemas.microsoft.com/office/drawing/2014/main" id="{8744BFDE-A996-3D09-65AE-21268D7B5C81}"/>
+                <a16:creationId xmlns:a16="http://schemas.microsoft.com/office/drawing/2014/main" id="{FBD5F757-6CD6-BF5C-5A1D-39A78E02A8BD}"/>
               </a:ext>
             </a:extLst>
           </p:cNvPr>
@@ -2672,7 +2672,7 @@
           <p:cNvPr id="7" name="スライド番号プレースホルダー 6">
             <a:extLst>
               <a:ext uri="{FF2B5EF4-FFF2-40B4-BE49-F238E27FC236}">
-                <a16:creationId xmlns:a16="http://schemas.microsoft.com/office/drawing/2014/main" id="{BA7DE69A-F6DF-33FD-9A83-DE908E16C144}"/>
+                <a16:creationId xmlns:a16="http://schemas.microsoft.com/office/drawing/2014/main" id="{ADF38F5E-982E-86DF-B44F-EEC66CC48C67}"/>
               </a:ext>
             </a:extLst>
           </p:cNvPr>
@@ -2688,7 +2688,7 @@
           <a:bodyPr/>
           <a:lstStyle/>
           <a:p>
-            <a:fld id="{849FD812-8448-4EDB-9DC0-EFC5EEA55363}" type="slidenum">
+            <a:fld id="{67EFB87E-B37C-4131-96DA-F16E65A9FE32}" type="slidenum">
               <a:rPr kumimoji="1" lang="ja-JP" altLang="en-US" smtClean="0"/>
               <a:t>‹#›</a:t>
             </a:fld>
@@ -2699,7 +2699,7 @@
     </p:spTree>
     <p:extLst>
       <p:ext uri="{BB962C8B-B14F-4D97-AF65-F5344CB8AC3E}">
-        <p14:creationId xmlns:p14="http://schemas.microsoft.com/office/powerpoint/2010/main" val="2528880718"/>
+        <p14:creationId xmlns:p14="http://schemas.microsoft.com/office/powerpoint/2010/main" val="370810459"/>
       </p:ext>
     </p:extLst>
   </p:cSld>
@@ -2731,7 +2731,7 @@
           <p:cNvPr id="2" name="タイトル 1">
             <a:extLst>
               <a:ext uri="{FF2B5EF4-FFF2-40B4-BE49-F238E27FC236}">
-                <a16:creationId xmlns:a16="http://schemas.microsoft.com/office/drawing/2014/main" id="{B8212AA0-FA4D-FB66-D9CF-4CA9EF0D3BBE}"/>
+                <a16:creationId xmlns:a16="http://schemas.microsoft.com/office/drawing/2014/main" id="{61623FBF-C6C7-43D3-1048-359710FBF639}"/>
               </a:ext>
             </a:extLst>
           </p:cNvPr>
@@ -2768,7 +2768,7 @@
           <p:cNvPr id="3" name="図プレースホルダー 2">
             <a:extLst>
               <a:ext uri="{FF2B5EF4-FFF2-40B4-BE49-F238E27FC236}">
-                <a16:creationId xmlns:a16="http://schemas.microsoft.com/office/drawing/2014/main" id="{644A1973-896D-EC49-D0A8-3BC5C3D89C5F}"/>
+                <a16:creationId xmlns:a16="http://schemas.microsoft.com/office/drawing/2014/main" id="{342C1AA4-CB9B-DCF8-A2E1-476760CDEE02}"/>
               </a:ext>
             </a:extLst>
           </p:cNvPr>
@@ -2835,7 +2835,7 @@
           <p:cNvPr id="4" name="テキスト プレースホルダー 3">
             <a:extLst>
               <a:ext uri="{FF2B5EF4-FFF2-40B4-BE49-F238E27FC236}">
-                <a16:creationId xmlns:a16="http://schemas.microsoft.com/office/drawing/2014/main" id="{46036057-405D-0792-1C0E-FB0E95AE95C6}"/>
+                <a16:creationId xmlns:a16="http://schemas.microsoft.com/office/drawing/2014/main" id="{53FB7589-DC61-A1A0-F53E-60FB4D616620}"/>
               </a:ext>
             </a:extLst>
           </p:cNvPr>
@@ -2906,7 +2906,7 @@
           <p:cNvPr id="5" name="日付プレースホルダー 4">
             <a:extLst>
               <a:ext uri="{FF2B5EF4-FFF2-40B4-BE49-F238E27FC236}">
-                <a16:creationId xmlns:a16="http://schemas.microsoft.com/office/drawing/2014/main" id="{CF78B52D-54E9-0E99-1289-B6A1587448AD}"/>
+                <a16:creationId xmlns:a16="http://schemas.microsoft.com/office/drawing/2014/main" id="{F9E66F6F-BA22-3684-BDF2-2635C4D5FA41}"/>
               </a:ext>
             </a:extLst>
           </p:cNvPr>
@@ -2922,7 +2922,7 @@
           <a:bodyPr/>
           <a:lstStyle/>
           <a:p>
-            <a:fld id="{542A8A9A-6F7E-4754-85FD-790E31A06468}" type="datetimeFigureOut">
+            <a:fld id="{F80CB07D-9DBE-48DD-A163-7A257CF94C91}" type="datetimeFigureOut">
               <a:rPr kumimoji="1" lang="ja-JP" altLang="en-US" smtClean="0"/>
               <a:t>2026/7/30</a:t>
             </a:fld>
@@ -2935,7 +2935,7 @@
           <p:cNvPr id="6" name="フッター プレースホルダー 5">
             <a:extLst>
               <a:ext uri="{FF2B5EF4-FFF2-40B4-BE49-F238E27FC236}">
-                <a16:creationId xmlns:a16="http://schemas.microsoft.com/office/drawing/2014/main" id="{7C1E23D6-C1AA-5FC1-FA2A-8646AC6AE227}"/>
+                <a16:creationId xmlns:a16="http://schemas.microsoft.com/office/drawing/2014/main" id="{923044EC-0AA6-1F74-B660-4DF341CBAA50}"/>
               </a:ext>
             </a:extLst>
           </p:cNvPr>
@@ -2960,7 +2960,7 @@
           <p:cNvPr id="7" name="スライド番号プレースホルダー 6">
             <a:extLst>
               <a:ext uri="{FF2B5EF4-FFF2-40B4-BE49-F238E27FC236}">
-                <a16:creationId xmlns:a16="http://schemas.microsoft.com/office/drawing/2014/main" id="{3DD8234C-838B-212D-ABCC-A92D5AD4CDAE}"/>
+                <a16:creationId xmlns:a16="http://schemas.microsoft.com/office/drawing/2014/main" id="{EF939209-F7AC-B305-CF99-EEA6431AA501}"/>
               </a:ext>
             </a:extLst>
           </p:cNvPr>
@@ -2976,7 +2976,7 @@
           <a:bodyPr/>
           <a:lstStyle/>
           <a:p>
-            <a:fld id="{849FD812-8448-4EDB-9DC0-EFC5EEA55363}" type="slidenum">
+            <a:fld id="{67EFB87E-B37C-4131-96DA-F16E65A9FE32}" type="slidenum">
               <a:rPr kumimoji="1" lang="ja-JP" altLang="en-US" smtClean="0"/>
               <a:t>‹#›</a:t>
             </a:fld>
@@ -2987,7 +2987,7 @@
     </p:spTree>
     <p:extLst>
       <p:ext uri="{BB962C8B-B14F-4D97-AF65-F5344CB8AC3E}">
-        <p14:creationId xmlns:p14="http://schemas.microsoft.com/office/powerpoint/2010/main" val="1770076952"/>
+        <p14:creationId xmlns:p14="http://schemas.microsoft.com/office/powerpoint/2010/main" val="1250600682"/>
       </p:ext>
     </p:extLst>
   </p:cSld>
@@ -3024,7 +3024,7 @@
           <p:cNvPr id="2" name="タイトル プレースホルダー 1">
             <a:extLst>
               <a:ext uri="{FF2B5EF4-FFF2-40B4-BE49-F238E27FC236}">
-                <a16:creationId xmlns:a16="http://schemas.microsoft.com/office/drawing/2014/main" id="{CCC8F8D8-FA05-DA05-D6BF-A52663F7D2E3}"/>
+                <a16:creationId xmlns:a16="http://schemas.microsoft.com/office/drawing/2014/main" id="{302277F9-554C-CD7A-18B0-86DE444537C8}"/>
               </a:ext>
             </a:extLst>
           </p:cNvPr>
@@ -3062,7 +3062,7 @@
           <p:cNvPr id="3" name="テキスト プレースホルダー 2">
             <a:extLst>
               <a:ext uri="{FF2B5EF4-FFF2-40B4-BE49-F238E27FC236}">
-                <a16:creationId xmlns:a16="http://schemas.microsoft.com/office/drawing/2014/main" id="{94EA3413-5BDB-D996-B2CC-8C2DAE887CF0}"/>
+                <a16:creationId xmlns:a16="http://schemas.microsoft.com/office/drawing/2014/main" id="{CD7C763A-A835-C0A0-F24F-2BDA0406B2F9}"/>
               </a:ext>
             </a:extLst>
           </p:cNvPr>
@@ -3161,7 +3161,7 @@
           <p:cNvPr id="4" name="日付プレースホルダー 3">
             <a:extLst>
               <a:ext uri="{FF2B5EF4-FFF2-40B4-BE49-F238E27FC236}">
-                <a16:creationId xmlns:a16="http://schemas.microsoft.com/office/drawing/2014/main" id="{9426EEB4-B3D3-7783-6356-D4107A942B10}"/>
+                <a16:creationId xmlns:a16="http://schemas.microsoft.com/office/drawing/2014/main" id="{E9AE93E1-96FC-A4CF-5ECF-D74F18F6CDC5}"/>
               </a:ext>
             </a:extLst>
           </p:cNvPr>
@@ -3195,7 +3195,7 @@
             </a:lvl1pPr>
           </a:lstStyle>
           <a:p>
-            <a:fld id="{542A8A9A-6F7E-4754-85FD-790E31A06468}" type="datetimeFigureOut">
+            <a:fld id="{F80CB07D-9DBE-48DD-A163-7A257CF94C91}" type="datetimeFigureOut">
               <a:rPr kumimoji="1" lang="ja-JP" altLang="en-US" smtClean="0"/>
               <a:t>2026/7/30</a:t>
             </a:fld>
@@ -3208,7 +3208,7 @@
           <p:cNvPr id="5" name="フッター プレースホルダー 4">
             <a:extLst>
               <a:ext uri="{FF2B5EF4-FFF2-40B4-BE49-F238E27FC236}">
-                <a16:creationId xmlns:a16="http://schemas.microsoft.com/office/drawing/2014/main" id="{969E2FB8-8531-3A4C-17B0-1AA7DAFE772D}"/>
+                <a16:creationId xmlns:a16="http://schemas.microsoft.com/office/drawing/2014/main" id="{91696BDE-8EB5-4208-7D72-6849AD45D6D8}"/>
               </a:ext>
             </a:extLst>
           </p:cNvPr>
@@ -3251,7 +3251,7 @@
           <p:cNvPr id="6" name="スライド番号プレースホルダー 5">
             <a:extLst>
               <a:ext uri="{FF2B5EF4-FFF2-40B4-BE49-F238E27FC236}">
-                <a16:creationId xmlns:a16="http://schemas.microsoft.com/office/drawing/2014/main" id="{C06C04DC-4B41-AD5E-C078-538A60DD7056}"/>
+                <a16:creationId xmlns:a16="http://schemas.microsoft.com/office/drawing/2014/main" id="{655FD588-157A-FDA2-3835-BAD4CFDDAE5E}"/>
               </a:ext>
             </a:extLst>
           </p:cNvPr>
@@ -3285,7 +3285,7 @@
             </a:lvl1pPr>
           </a:lstStyle>
           <a:p>
-            <a:fld id="{849FD812-8448-4EDB-9DC0-EFC5EEA55363}" type="slidenum">
+            <a:fld id="{67EFB87E-B37C-4131-96DA-F16E65A9FE32}" type="slidenum">
               <a:rPr kumimoji="1" lang="ja-JP" altLang="en-US" smtClean="0"/>
               <a:t>‹#›</a:t>
             </a:fld>
@@ -3296,7 +3296,7 @@
     </p:spTree>
     <p:extLst>
       <p:ext uri="{BB962C8B-B14F-4D97-AF65-F5344CB8AC3E}">
-        <p14:creationId xmlns:p14="http://schemas.microsoft.com/office/powerpoint/2010/main" val="4234946409"/>
+        <p14:creationId xmlns:p14="http://schemas.microsoft.com/office/powerpoint/2010/main" val="2138961867"/>
       </p:ext>
     </p:extLst>
   </p:cSld>
@@ -3619,7 +3619,7 @@
           <p:cNvPr id="2" name="テキスト ボックス 1">
             <a:extLst>
               <a:ext uri="{FF2B5EF4-FFF2-40B4-BE49-F238E27FC236}">
-                <a16:creationId xmlns:a16="http://schemas.microsoft.com/office/drawing/2014/main" id="{B64F6497-7102-9C4D-0F91-88A5C2243879}"/>
+                <a16:creationId xmlns:a16="http://schemas.microsoft.com/office/drawing/2014/main" id="{C717E5D2-F9ED-A895-1BE2-F426CBE91C7F}"/>
               </a:ext>
             </a:extLst>
           </p:cNvPr>
@@ -3665,7 +3665,7 @@
           <p:cNvPr id="3" name="テキスト ボックス 2">
             <a:extLst>
               <a:ext uri="{FF2B5EF4-FFF2-40B4-BE49-F238E27FC236}">
-                <a16:creationId xmlns:a16="http://schemas.microsoft.com/office/drawing/2014/main" id="{05E3306F-67EC-13DB-ED18-7CEE1AEDC229}"/>
+                <a16:creationId xmlns:a16="http://schemas.microsoft.com/office/drawing/2014/main" id="{7C1163BD-79F1-CD6A-1A45-2FAD4C6B30B4}"/>
               </a:ext>
             </a:extLst>
           </p:cNvPr>
@@ -3714,7 +3714,7 @@
           <p:cNvPr id="4" name="テキスト ボックス 3">
             <a:extLst>
               <a:ext uri="{FF2B5EF4-FFF2-40B4-BE49-F238E27FC236}">
-                <a16:creationId xmlns:a16="http://schemas.microsoft.com/office/drawing/2014/main" id="{61243983-8193-A41C-5132-8844C0939D7D}"/>
+                <a16:creationId xmlns:a16="http://schemas.microsoft.com/office/drawing/2014/main" id="{AC5A1070-CDE5-7ABC-109B-96CB9CF90BB8}"/>
               </a:ext>
             </a:extLst>
           </p:cNvPr>
@@ -3754,7 +3754,7 @@
           <p:cNvPr id="5" name="テキスト ボックス 4">
             <a:extLst>
               <a:ext uri="{FF2B5EF4-FFF2-40B4-BE49-F238E27FC236}">
-                <a16:creationId xmlns:a16="http://schemas.microsoft.com/office/drawing/2014/main" id="{7E6EC9C4-C131-AC37-63B9-5E8302570554}"/>
+                <a16:creationId xmlns:a16="http://schemas.microsoft.com/office/drawing/2014/main" id="{3A292AA8-3036-24D9-4548-AF1EEDDF75E5}"/>
               </a:ext>
             </a:extLst>
           </p:cNvPr>
@@ -3801,7 +3801,7 @@
             <a:hlinkClick r:id="" action="ppaction://media"/>
             <a:extLst>
               <a:ext uri="{FF2B5EF4-FFF2-40B4-BE49-F238E27FC236}">
-                <a16:creationId xmlns:a16="http://schemas.microsoft.com/office/drawing/2014/main" id="{0816AECB-5D70-EAF8-E0B6-9F010C68C5E9}"/>
+                <a16:creationId xmlns:a16="http://schemas.microsoft.com/office/drawing/2014/main" id="{579D0690-F349-67C8-13B5-32439DEC6483}"/>
               </a:ext>
             </a:extLst>
           </p:cNvPr>
@@ -3836,7 +3836,7 @@
     </p:spTree>
     <p:extLst>
       <p:ext uri="{BB962C8B-B14F-4D97-AF65-F5344CB8AC3E}">
-        <p14:creationId xmlns:p14="http://schemas.microsoft.com/office/powerpoint/2010/main" val="1906147361"/>
+        <p14:creationId xmlns:p14="http://schemas.microsoft.com/office/powerpoint/2010/main" val="1489324686"/>
       </p:ext>
     </p:extLst>
   </p:cSld>
@@ -3960,7 +3960,7 @@
           <p:cNvPr id="2" name="テキスト ボックス 1">
             <a:extLst>
               <a:ext uri="{FF2B5EF4-FFF2-40B4-BE49-F238E27FC236}">
-                <a16:creationId xmlns:a16="http://schemas.microsoft.com/office/drawing/2014/main" id="{066A1F5E-30ED-7EF1-CFE1-E3197E0DBEC7}"/>
+                <a16:creationId xmlns:a16="http://schemas.microsoft.com/office/drawing/2014/main" id="{183A7FC7-3A73-C21A-76AC-19757AE1951C}"/>
               </a:ext>
             </a:extLst>
           </p:cNvPr>
@@ -4006,7 +4006,7 @@
           <p:cNvPr id="3" name="テキスト ボックス 2">
             <a:extLst>
               <a:ext uri="{FF2B5EF4-FFF2-40B4-BE49-F238E27FC236}">
-                <a16:creationId xmlns:a16="http://schemas.microsoft.com/office/drawing/2014/main" id="{70B6092F-1208-93E2-726D-527DE223A55B}"/>
+                <a16:creationId xmlns:a16="http://schemas.microsoft.com/office/drawing/2014/main" id="{DC7B73E2-EED5-E093-51EB-BEA6DF31A8D0}"/>
               </a:ext>
             </a:extLst>
           </p:cNvPr>
@@ -4046,7 +4046,7 @@
           <p:cNvPr id="4" name="テキスト ボックス 3">
             <a:extLst>
               <a:ext uri="{FF2B5EF4-FFF2-40B4-BE49-F238E27FC236}">
-                <a16:creationId xmlns:a16="http://schemas.microsoft.com/office/drawing/2014/main" id="{B914B1C4-F3A3-413F-EC13-BE6F11ED0565}"/>
+                <a16:creationId xmlns:a16="http://schemas.microsoft.com/office/drawing/2014/main" id="{900FA327-B4B8-D923-F293-D8AC68222781}"/>
               </a:ext>
             </a:extLst>
           </p:cNvPr>
@@ -4095,7 +4095,7 @@
           <p:cNvPr id="5" name="テキスト ボックス 4">
             <a:extLst>
               <a:ext uri="{FF2B5EF4-FFF2-40B4-BE49-F238E27FC236}">
-                <a16:creationId xmlns:a16="http://schemas.microsoft.com/office/drawing/2014/main" id="{7220ADBF-80FE-2161-4D54-CE0B45062B26}"/>
+                <a16:creationId xmlns:a16="http://schemas.microsoft.com/office/drawing/2014/main" id="{DD644795-16EF-0B04-9D5B-CA0DB83F97FF}"/>
               </a:ext>
             </a:extLst>
           </p:cNvPr>
@@ -4142,7 +4142,7 @@
             <a:hlinkClick r:id="" action="ppaction://media"/>
             <a:extLst>
               <a:ext uri="{FF2B5EF4-FFF2-40B4-BE49-F238E27FC236}">
-                <a16:creationId xmlns:a16="http://schemas.microsoft.com/office/drawing/2014/main" id="{357577A7-9319-4A80-8522-C5B434A1D28D}"/>
+                <a16:creationId xmlns:a16="http://schemas.microsoft.com/office/drawing/2014/main" id="{154A5BF3-BFEF-2FD8-2B25-F17C86DD24CE}"/>
               </a:ext>
             </a:extLst>
           </p:cNvPr>
@@ -4177,7 +4177,7 @@
     </p:spTree>
     <p:extLst>
       <p:ext uri="{BB962C8B-B14F-4D97-AF65-F5344CB8AC3E}">
-        <p14:creationId xmlns:p14="http://schemas.microsoft.com/office/powerpoint/2010/main" val="1876226740"/>
+        <p14:creationId xmlns:p14="http://schemas.microsoft.com/office/powerpoint/2010/main" val="3071496074"/>
       </p:ext>
     </p:extLst>
   </p:cSld>
@@ -4301,7 +4301,7 @@
           <p:cNvPr id="2" name="テキスト ボックス 1">
             <a:extLst>
               <a:ext uri="{FF2B5EF4-FFF2-40B4-BE49-F238E27FC236}">
-                <a16:creationId xmlns:a16="http://schemas.microsoft.com/office/drawing/2014/main" id="{3E312480-9A08-3FDC-B367-85DF7D2F5AB2}"/>
+                <a16:creationId xmlns:a16="http://schemas.microsoft.com/office/drawing/2014/main" id="{16717BB1-3D3B-F43F-2AF2-7C3371190C19}"/>
               </a:ext>
             </a:extLst>
           </p:cNvPr>
@@ -4347,7 +4347,7 @@
           <p:cNvPr id="3" name="テキスト ボックス 2">
             <a:extLst>
               <a:ext uri="{FF2B5EF4-FFF2-40B4-BE49-F238E27FC236}">
-                <a16:creationId xmlns:a16="http://schemas.microsoft.com/office/drawing/2014/main" id="{FEB0C2C2-86FB-580A-EFA4-3A4033EEE1EB}"/>
+                <a16:creationId xmlns:a16="http://schemas.microsoft.com/office/drawing/2014/main" id="{91128092-36E7-C495-A323-616B2A269F9D}"/>
               </a:ext>
             </a:extLst>
           </p:cNvPr>
@@ -4387,7 +4387,7 @@
           <p:cNvPr id="4" name="テキスト ボックス 3">
             <a:extLst>
               <a:ext uri="{FF2B5EF4-FFF2-40B4-BE49-F238E27FC236}">
-                <a16:creationId xmlns:a16="http://schemas.microsoft.com/office/drawing/2014/main" id="{7872551F-00D9-6CAC-C2F3-9D275A0E0103}"/>
+                <a16:creationId xmlns:a16="http://schemas.microsoft.com/office/drawing/2014/main" id="{5571E693-F564-90B8-CBFA-8F6F6E50B0E9}"/>
               </a:ext>
             </a:extLst>
           </p:cNvPr>
@@ -4482,7 +4482,7 @@
           <p:cNvPr id="5" name="テキスト ボックス 4">
             <a:extLst>
               <a:ext uri="{FF2B5EF4-FFF2-40B4-BE49-F238E27FC236}">
-                <a16:creationId xmlns:a16="http://schemas.microsoft.com/office/drawing/2014/main" id="{2732543B-69BF-760F-66E9-E2C01D2D3D85}"/>
+                <a16:creationId xmlns:a16="http://schemas.microsoft.com/office/drawing/2014/main" id="{E7C8A535-4139-4BEB-FA6F-BE9563A604C5}"/>
               </a:ext>
             </a:extLst>
           </p:cNvPr>
@@ -4529,7 +4529,7 @@
             <a:hlinkClick r:id="" action="ppaction://media"/>
             <a:extLst>
               <a:ext uri="{FF2B5EF4-FFF2-40B4-BE49-F238E27FC236}">
-                <a16:creationId xmlns:a16="http://schemas.microsoft.com/office/drawing/2014/main" id="{D657F1B5-C401-8377-FC62-244644941164}"/>
+                <a16:creationId xmlns:a16="http://schemas.microsoft.com/office/drawing/2014/main" id="{C6DC5216-09D7-9ACC-6FCC-0F505A794F9B}"/>
               </a:ext>
             </a:extLst>
           </p:cNvPr>
@@ -4564,7 +4564,7 @@
     </p:spTree>
     <p:extLst>
       <p:ext uri="{BB962C8B-B14F-4D97-AF65-F5344CB8AC3E}">
-        <p14:creationId xmlns:p14="http://schemas.microsoft.com/office/powerpoint/2010/main" val="2742598416"/>
+        <p14:creationId xmlns:p14="http://schemas.microsoft.com/office/powerpoint/2010/main" val="2740113863"/>
       </p:ext>
     </p:extLst>
   </p:cSld>
@@ -4688,7 +4688,7 @@
           <p:cNvPr id="2" name="テキスト ボックス 1">
             <a:extLst>
               <a:ext uri="{FF2B5EF4-FFF2-40B4-BE49-F238E27FC236}">
-                <a16:creationId xmlns:a16="http://schemas.microsoft.com/office/drawing/2014/main" id="{5D0C6FBF-5244-36E3-176D-12035C2F4776}"/>
+                <a16:creationId xmlns:a16="http://schemas.microsoft.com/office/drawing/2014/main" id="{4C5EAB47-2D23-DCF6-DC45-93E8496BFE7F}"/>
               </a:ext>
             </a:extLst>
           </p:cNvPr>
@@ -4734,7 +4734,7 @@
           <p:cNvPr id="3" name="テキスト ボックス 2">
             <a:extLst>
               <a:ext uri="{FF2B5EF4-FFF2-40B4-BE49-F238E27FC236}">
-                <a16:creationId xmlns:a16="http://schemas.microsoft.com/office/drawing/2014/main" id="{819BCBFE-3A68-8034-63DD-D532360DBBAD}"/>
+                <a16:creationId xmlns:a16="http://schemas.microsoft.com/office/drawing/2014/main" id="{05BDE862-ED99-ADEB-C4F2-6D75457F8D5F}"/>
               </a:ext>
             </a:extLst>
           </p:cNvPr>
@@ -4774,7 +4774,7 @@
           <p:cNvPr id="4" name="テキスト ボックス 3">
             <a:extLst>
               <a:ext uri="{FF2B5EF4-FFF2-40B4-BE49-F238E27FC236}">
-                <a16:creationId xmlns:a16="http://schemas.microsoft.com/office/drawing/2014/main" id="{1A79AE09-17A4-9EB8-5F64-048D465E225E}"/>
+                <a16:creationId xmlns:a16="http://schemas.microsoft.com/office/drawing/2014/main" id="{28896EDD-C09D-2365-9AE7-492C59D260B9}"/>
               </a:ext>
             </a:extLst>
           </p:cNvPr>
@@ -4884,7 +4884,7 @@
           <p:cNvPr id="5" name="テキスト ボックス 4">
             <a:extLst>
               <a:ext uri="{FF2B5EF4-FFF2-40B4-BE49-F238E27FC236}">
-                <a16:creationId xmlns:a16="http://schemas.microsoft.com/office/drawing/2014/main" id="{4AF41595-64A5-34EA-7B62-C006C3EC551C}"/>
+                <a16:creationId xmlns:a16="http://schemas.microsoft.com/office/drawing/2014/main" id="{E5A302D0-2E43-980A-75CE-6381C509980F}"/>
               </a:ext>
             </a:extLst>
           </p:cNvPr>
@@ -4931,7 +4931,7 @@
             <a:hlinkClick r:id="" action="ppaction://media"/>
             <a:extLst>
               <a:ext uri="{FF2B5EF4-FFF2-40B4-BE49-F238E27FC236}">
-                <a16:creationId xmlns:a16="http://schemas.microsoft.com/office/drawing/2014/main" id="{3D8527C3-163C-1B00-6D21-7DE2A19E5476}"/>
+                <a16:creationId xmlns:a16="http://schemas.microsoft.com/office/drawing/2014/main" id="{2A00F29E-DA97-D603-E2C1-128D91E1F83D}"/>
               </a:ext>
             </a:extLst>
           </p:cNvPr>
@@ -4966,7 +4966,7 @@
     </p:spTree>
     <p:extLst>
       <p:ext uri="{BB962C8B-B14F-4D97-AF65-F5344CB8AC3E}">
-        <p14:creationId xmlns:p14="http://schemas.microsoft.com/office/powerpoint/2010/main" val="3191026208"/>
+        <p14:creationId xmlns:p14="http://schemas.microsoft.com/office/powerpoint/2010/main" val="3082455726"/>
       </p:ext>
     </p:extLst>
   </p:cSld>
@@ -5090,7 +5090,7 @@
           <p:cNvPr id="2" name="テキスト ボックス 1">
             <a:extLst>
               <a:ext uri="{FF2B5EF4-FFF2-40B4-BE49-F238E27FC236}">
-                <a16:creationId xmlns:a16="http://schemas.microsoft.com/office/drawing/2014/main" id="{4B3D088F-2186-3E5C-4E23-B911D5F4DB86}"/>
+                <a16:creationId xmlns:a16="http://schemas.microsoft.com/office/drawing/2014/main" id="{0868E47C-5754-E5AE-8F83-3DBB227DCCD3}"/>
               </a:ext>
             </a:extLst>
           </p:cNvPr>
@@ -5136,7 +5136,7 @@
           <p:cNvPr id="3" name="テキスト ボックス 2">
             <a:extLst>
               <a:ext uri="{FF2B5EF4-FFF2-40B4-BE49-F238E27FC236}">
-                <a16:creationId xmlns:a16="http://schemas.microsoft.com/office/drawing/2014/main" id="{3C418A7B-AE16-D589-97A9-4B66F2966B07}"/>
+                <a16:creationId xmlns:a16="http://schemas.microsoft.com/office/drawing/2014/main" id="{7A9E64A3-DAA6-C800-1BAE-40212FA4AF5E}"/>
               </a:ext>
             </a:extLst>
           </p:cNvPr>
@@ -5176,7 +5176,7 @@
           <p:cNvPr id="4" name="テキスト ボックス 3">
             <a:extLst>
               <a:ext uri="{FF2B5EF4-FFF2-40B4-BE49-F238E27FC236}">
-                <a16:creationId xmlns:a16="http://schemas.microsoft.com/office/drawing/2014/main" id="{6797DA5C-7473-0589-4797-31EAD631AB1F}"/>
+                <a16:creationId xmlns:a16="http://schemas.microsoft.com/office/drawing/2014/main" id="{1038F835-B661-56DD-2CEE-80A2E3F51E92}"/>
               </a:ext>
             </a:extLst>
           </p:cNvPr>
@@ -5200,20 +5200,14 @@
           <a:lstStyle/>
           <a:p>
             <a:r>
-              <a:rPr kumimoji="1" lang="en-US" altLang="ja-JP" sz="2000">
+              <a:rPr kumimoji="1" lang="ja-JP" altLang="en-US" sz="2000">
                 <a:solidFill>
                   <a:srgbClr val="333333"/>
                 </a:solidFill>
                 <a:latin typeface="Arial" panose="020B0604020202020204" pitchFamily="34" charset="0"/>
               </a:rPr>
-              <a:t>Improve SEO UGC and monetization flows</a:t>
-            </a:r>
-            <a:endParaRPr kumimoji="1" lang="ja-JP" altLang="en-US" sz="2000">
-              <a:solidFill>
-                <a:srgbClr val="333333"/>
-              </a:solidFill>
-              <a:latin typeface="Arial" panose="020B0604020202020204" pitchFamily="34" charset="0"/>
-            </a:endParaRPr>
+              <a:t>直近のコミットでは、構成の更新と保守性の改善が行われました。</a:t>
+            </a:r>
           </a:p>
         </p:txBody>
       </p:sp>
@@ -5222,7 +5216,7 @@
           <p:cNvPr id="5" name="テキスト ボックス 4">
             <a:extLst>
               <a:ext uri="{FF2B5EF4-FFF2-40B4-BE49-F238E27FC236}">
-                <a16:creationId xmlns:a16="http://schemas.microsoft.com/office/drawing/2014/main" id="{3B69B464-699D-2FC4-45B1-28D1D7053FE5}"/>
+                <a16:creationId xmlns:a16="http://schemas.microsoft.com/office/drawing/2014/main" id="{90CD7025-2B8E-7E79-6540-D79C5398AECC}"/>
               </a:ext>
             </a:extLst>
           </p:cNvPr>
@@ -5269,7 +5263,7 @@
             <a:hlinkClick r:id="" action="ppaction://media"/>
             <a:extLst>
               <a:ext uri="{FF2B5EF4-FFF2-40B4-BE49-F238E27FC236}">
-                <a16:creationId xmlns:a16="http://schemas.microsoft.com/office/drawing/2014/main" id="{D8441CE1-4E18-C5B5-ADC6-DF323ED5F3C6}"/>
+                <a16:creationId xmlns:a16="http://schemas.microsoft.com/office/drawing/2014/main" id="{F008B61B-9062-914E-4048-CAAD7C45793A}"/>
               </a:ext>
             </a:extLst>
           </p:cNvPr>
@@ -5304,7 +5298,7 @@
     </p:spTree>
     <p:extLst>
       <p:ext uri="{BB962C8B-B14F-4D97-AF65-F5344CB8AC3E}">
-        <p14:creationId xmlns:p14="http://schemas.microsoft.com/office/powerpoint/2010/main" val="333861082"/>
+        <p14:creationId xmlns:p14="http://schemas.microsoft.com/office/powerpoint/2010/main" val="164896936"/>
       </p:ext>
     </p:extLst>
   </p:cSld>
@@ -5313,10 +5307,10 @@
   </p:clrMapOvr>
   <mc:AlternateContent xmlns:mc="http://schemas.openxmlformats.org/markup-compatibility/2006">
     <mc:Choice xmlns:p14="http://schemas.microsoft.com/office/powerpoint/2010/main" Requires="p14">
-      <p:transition spd="slow" p14:dur="2000" advTm="9000"/>
+      <p:transition spd="slow" p14:dur="2000" advTm="7000"/>
     </mc:Choice>
     <mc:Fallback>
-      <p:transition spd="slow" advTm="9000"/>
+      <p:transition spd="slow" advTm="7000"/>
     </mc:Fallback>
   </mc:AlternateContent>
   <p:timing>
@@ -5347,7 +5341,7 @@
                                   <p:childTnLst>
                                     <p:cmd type="call" cmd="playFrom(0.0)">
                                       <p:cBhvr>
-                                        <p:cTn id="6" dur="8006" fill="hold"/>
+                                        <p:cTn id="6" dur="6036" fill="hold"/>
                                         <p:tgtEl>
                                           <p:spTgt spid="6"/>
                                         </p:tgtEl>
@@ -5428,7 +5422,7 @@
           <p:cNvPr id="2" name="テキスト ボックス 1">
             <a:extLst>
               <a:ext uri="{FF2B5EF4-FFF2-40B4-BE49-F238E27FC236}">
-                <a16:creationId xmlns:a16="http://schemas.microsoft.com/office/drawing/2014/main" id="{9A1FC051-BD78-301B-7C96-577F937B17F9}"/>
+                <a16:creationId xmlns:a16="http://schemas.microsoft.com/office/drawing/2014/main" id="{4DF3FBC0-1097-0FE1-4335-315F4BC28997}"/>
               </a:ext>
             </a:extLst>
           </p:cNvPr>
@@ -5474,7 +5468,7 @@
           <p:cNvPr id="3" name="テキスト ボックス 2">
             <a:extLst>
               <a:ext uri="{FF2B5EF4-FFF2-40B4-BE49-F238E27FC236}">
-                <a16:creationId xmlns:a16="http://schemas.microsoft.com/office/drawing/2014/main" id="{4BD3B0FB-4BE7-5E3A-B030-0120F2CA0C19}"/>
+                <a16:creationId xmlns:a16="http://schemas.microsoft.com/office/drawing/2014/main" id="{38236827-297C-4B04-999B-E9ED1A70ADFF}"/>
               </a:ext>
             </a:extLst>
           </p:cNvPr>
@@ -5514,7 +5508,7 @@
           <p:cNvPr id="4" name="テキスト ボックス 3">
             <a:extLst>
               <a:ext uri="{FF2B5EF4-FFF2-40B4-BE49-F238E27FC236}">
-                <a16:creationId xmlns:a16="http://schemas.microsoft.com/office/drawing/2014/main" id="{B88A5266-7DC5-20C2-80A9-178CC554A503}"/>
+                <a16:creationId xmlns:a16="http://schemas.microsoft.com/office/drawing/2014/main" id="{8F57A11D-096A-02B8-F36D-E84B4EA9302C}"/>
               </a:ext>
             </a:extLst>
           </p:cNvPr>
@@ -5579,7 +5573,7 @@
           <p:cNvPr id="5" name="テキスト ボックス 4">
             <a:extLst>
               <a:ext uri="{FF2B5EF4-FFF2-40B4-BE49-F238E27FC236}">
-                <a16:creationId xmlns:a16="http://schemas.microsoft.com/office/drawing/2014/main" id="{0F0BAAE2-6166-AFC5-3204-C7AB47FA1C8E}"/>
+                <a16:creationId xmlns:a16="http://schemas.microsoft.com/office/drawing/2014/main" id="{5B6B6A65-351F-6C9A-4BAE-E1015F2D471F}"/>
               </a:ext>
             </a:extLst>
           </p:cNvPr>
@@ -5626,7 +5620,7 @@
             <a:hlinkClick r:id="" action="ppaction://media"/>
             <a:extLst>
               <a:ext uri="{FF2B5EF4-FFF2-40B4-BE49-F238E27FC236}">
-                <a16:creationId xmlns:a16="http://schemas.microsoft.com/office/drawing/2014/main" id="{EA8217C5-062A-18C8-E2BD-3C22E2AC271D}"/>
+                <a16:creationId xmlns:a16="http://schemas.microsoft.com/office/drawing/2014/main" id="{BC45404A-0E09-4F53-77EF-A6906631309F}"/>
               </a:ext>
             </a:extLst>
           </p:cNvPr>
@@ -5661,7 +5655,7 @@
     </p:spTree>
     <p:extLst>
       <p:ext uri="{BB962C8B-B14F-4D97-AF65-F5344CB8AC3E}">
-        <p14:creationId xmlns:p14="http://schemas.microsoft.com/office/powerpoint/2010/main" val="928862580"/>
+        <p14:creationId xmlns:p14="http://schemas.microsoft.com/office/powerpoint/2010/main" val="736761055"/>
       </p:ext>
     </p:extLst>
   </p:cSld>
